--- a/fase5_pitch/presentacion_CheckBefore.pptx
+++ b/fase5_pitch/presentacion_CheckBefore.pptx
@@ -8571,7 +8571,7 @@
                 <a:latin typeface="Calibri" panose="020F0502020204030204" pitchFamily="34" charset="0"/>
               </a:rPr>
               <a:t>Sistema de Analitica del Aprendizaje para el
-Soporte a Decisiones Pedagogicas en eVirtual Moodle</a:t>
+Soporte a Decisiones Pedagogicas en Moodle</a:t>
             </a:r>
             <a:endParaRPr lang="en-US" sz="2100" i="1">
               <a:solidFill>
@@ -9931,7 +9931,7 @@
                 </a:solidFill>
                 <a:latin typeface="Calibri" panose="020F0502020204030204" pitchFamily="34" charset="0"/>
               </a:rPr>
-              <a:t>Registros existentes en eVirtual Moodle con privacidad por diseno</a:t>
+              <a:t>Registros existentes en Moodle con privacidad por diseno</a:t>
             </a:r>
             <a:endParaRPr lang="en-US" sz="1600" i="1">
               <a:solidFill>
@@ -10181,7 +10181,7 @@
                 </a:solidFill>
                 <a:latin typeface="Calibri" panose="020F0502020204030204" pitchFamily="34" charset="0"/>
               </a:rPr>
-              <a:t>TABLAS DE MOODLE (eVirtual UCuenca)</a:t>
+              <a:t>TABLAS DE MOODLE (UCuenca)</a:t>
             </a:r>
             <a:endParaRPr lang="en-US" sz="1200" b="1">
               <a:solidFill>
